--- a/10-plantas/01-steelmaking/05-capacitacion/MS-ACE-01/MS-ACE-01_Capacitacion_AMMX.pptx
+++ b/10-plantas/01-steelmaking/05-capacitacion/MS-ACE-01/MS-ACE-01_Capacitacion_AMMX.pptx
@@ -10612,7 +10612,7 @@
                           <a:ea typeface="Century Gothic" pitchFamily="34" charset="-122"/>
                           <a:cs typeface="Century Gothic" pitchFamily="34" charset="-120"/>
                         </a:rPr>
-                        <a:t>Solo S-12, S-13, S-14 y C-06 en roja; nadie bajo la máquina hasta que C-06 libere</a:t>
+                        <a:t>Solo S-12, S-13, S-14 y C-06 en roja; nadie bajo la máquina hasta que la hebra salga de extractores y C-06 libere</a:t>
                       </a:r>
                       <a:endParaRPr lang="en-US" sz="1000" dirty="0">
                         <a:latin typeface="Century Gothic" charset="0"/>
@@ -16529,7 +16529,7 @@
                 <a:ea typeface="Century Gothic" pitchFamily="34" charset="-122"/>
                 <a:cs typeface="Century Gothic" pitchFamily="34" charset="-120"/>
               </a:rPr>
-              <a:t>Verifica que la zona roja está vacía antes de iniciar (visual + CCTV)</a:t>
+              <a:t>Cierra accesos con barreras y verifica la zona roja vacía (visual + CCTV) antes de iniciar</a:t>
             </a:r>
             <a:endParaRPr lang="en-US" sz="1050" dirty="0"/>
           </a:p>
@@ -16550,7 +16550,7 @@
                 <a:ea typeface="Century Gothic" pitchFamily="34" charset="-122"/>
                 <a:cs typeface="Century Gothic" pitchFamily="34" charset="-120"/>
               </a:rPr>
-              <a:t>Anuncia y espera ≥ 30 s con sirena y semáforo</a:t>
+              <a:t>Prueba sirena, semáforo y CCTV al inicio del turno; anuncia y espera ≥ 30 s</a:t>
             </a:r>
             <a:endParaRPr lang="en-US" sz="1050" dirty="0"/>
           </a:p>
@@ -19356,7 +19356,7 @@
                 <a:ea typeface="Calibri" pitchFamily="34" charset="-122"/>
                 <a:cs typeface="Calibri" pitchFamily="34" charset="-120"/>
               </a:rPr>
-              <a:t>Siguiente paso: OJT supervisado y evaluación práctica (TD-P07); registro en IMaS y DC-3/SIRCE. Validación: visto bueno seguridad (pendientes: técnica, laboral, diseño instruccional).</a:t>
+              <a:t>Siguiente paso: OJT supervisado y evaluación práctica (TD-P07); registro en IMaS y DC-3/SIRCE. Validación: visto bueno técnica, seguridad, laboral, diseño instruccional.</a:t>
             </a:r>
             <a:endParaRPr lang="en-US" sz="750" dirty="0"/>
           </a:p>
@@ -20362,7 +20362,7 @@
                 <a:ea typeface="Century Gothic" pitchFamily="34" charset="-122"/>
                 <a:cs typeface="Century Gothic" pitchFamily="34" charset="-120"/>
               </a:rPr>
-              <a:t>Reconocer las tres zonas</a:t>
+              <a:t>Señalar las tres zonas en campo</a:t>
             </a:r>
             <a:endParaRPr lang="en-US" sz="1350" dirty="0"/>
           </a:p>
